--- a/AI,ML,GENAI,AGENTIC.pptx
+++ b/AI,ML,GENAI,AGENTIC.pptx
@@ -157,12 +157,12 @@
   <pc:docChgLst>
     <pc:chgData name="Ashish Chopra" userId="73b777bb-d56d-4042-ab11-fa04ce11e99f" providerId="ADAL" clId="{375ACA70-C26F-4825-A925-AA60B44A12C0}"/>
     <pc:docChg chg="undo redo custSel addSld delSld modSld sldOrd delMainMaster">
-      <pc:chgData name="Ashish Chopra" userId="73b777bb-d56d-4042-ab11-fa04ce11e99f" providerId="ADAL" clId="{375ACA70-C26F-4825-A925-AA60B44A12C0}" dt="2026-07-09T20:59:26.455" v="33784" actId="478"/>
+      <pc:chgData name="Ashish Chopra" userId="73b777bb-d56d-4042-ab11-fa04ce11e99f" providerId="ADAL" clId="{375ACA70-C26F-4825-A925-AA60B44A12C0}" dt="2026-07-09T08:04:30.429" v="33783" actId="207"/>
       <pc:docMkLst>
         <pc:docMk/>
       </pc:docMkLst>
       <pc:sldChg chg="addSp delSp modSp add del mod setBg chgLayout">
-        <pc:chgData name="Ashish Chopra" userId="73b777bb-d56d-4042-ab11-fa04ce11e99f" providerId="ADAL" clId="{375ACA70-C26F-4825-A925-AA60B44A12C0}" dt="2026-07-09T20:59:26.455" v="33784" actId="478"/>
+        <pc:chgData name="Ashish Chopra" userId="73b777bb-d56d-4042-ab11-fa04ce11e99f" providerId="ADAL" clId="{375ACA70-C26F-4825-A925-AA60B44A12C0}" dt="2026-07-09T07:04:40.603" v="32108" actId="1038"/>
         <pc:sldMkLst>
           <pc:docMk/>
           <pc:sldMk cId="0" sldId="256"/>
@@ -215,8 +215,8 @@
             <ac:picMk id="4" creationId="{C72075E5-E5EB-BB98-56FA-77D64E435814}"/>
           </ac:picMkLst>
         </pc:picChg>
-        <pc:picChg chg="add del mod">
-          <ac:chgData name="Ashish Chopra" userId="73b777bb-d56d-4042-ab11-fa04ce11e99f" providerId="ADAL" clId="{375ACA70-C26F-4825-A925-AA60B44A12C0}" dt="2026-07-09T20:59:26.455" v="33784" actId="478"/>
+        <pc:picChg chg="add mod">
+          <ac:chgData name="Ashish Chopra" userId="73b777bb-d56d-4042-ab11-fa04ce11e99f" providerId="ADAL" clId="{375ACA70-C26F-4825-A925-AA60B44A12C0}" dt="2026-07-09T07:04:20.352" v="32099" actId="1035"/>
           <ac:picMkLst>
             <pc:docMk/>
             <pc:sldMk cId="0" sldId="256"/>
@@ -2332,7 +2332,7 @@
           <a:p>
             <a:fld id="{3BAD7437-FAE0-451C-8BB2-D27B3E1DE48E}" type="datetimeFigureOut">
               <a:rPr lang="en-AU" smtClean="0"/>
-              <a:t>10/07/2026</a:t>
+              <a:t>9/07/2026</a:t>
             </a:fld>
             <a:endParaRPr lang="en-AU"/>
           </a:p>
@@ -2729,7 +2729,7 @@
           <a:p>
             <a:fld id="{5BCAD085-E8A6-8845-BD4E-CB4CCA059FC4}" type="datetimeFigureOut">
               <a:rPr lang="en-US" smtClean="0"/>
-              <a:t>7/10/2026</a:t>
+              <a:t>7/9/2026</a:t>
             </a:fld>
             <a:endParaRPr lang="en-US"/>
           </a:p>
@@ -2897,7 +2897,7 @@
           <a:p>
             <a:fld id="{5BCAD085-E8A6-8845-BD4E-CB4CCA059FC4}" type="datetimeFigureOut">
               <a:rPr lang="en-US" smtClean="0"/>
-              <a:t>7/10/2026</a:t>
+              <a:t>7/9/2026</a:t>
             </a:fld>
             <a:endParaRPr lang="en-US"/>
           </a:p>
@@ -3075,7 +3075,7 @@
           <a:p>
             <a:fld id="{5BCAD085-E8A6-8845-BD4E-CB4CCA059FC4}" type="datetimeFigureOut">
               <a:rPr lang="en-US" smtClean="0"/>
-              <a:t>7/10/2026</a:t>
+              <a:t>7/9/2026</a:t>
             </a:fld>
             <a:endParaRPr lang="en-US"/>
           </a:p>
@@ -3243,7 +3243,7 @@
           <a:p>
             <a:fld id="{5BCAD085-E8A6-8845-BD4E-CB4CCA059FC4}" type="datetimeFigureOut">
               <a:rPr lang="en-US" smtClean="0"/>
-              <a:t>7/10/2026</a:t>
+              <a:t>7/9/2026</a:t>
             </a:fld>
             <a:endParaRPr lang="en-US"/>
           </a:p>
@@ -3488,7 +3488,7 @@
           <a:p>
             <a:fld id="{5BCAD085-E8A6-8845-BD4E-CB4CCA059FC4}" type="datetimeFigureOut">
               <a:rPr lang="en-US" smtClean="0"/>
-              <a:t>7/10/2026</a:t>
+              <a:t>7/9/2026</a:t>
             </a:fld>
             <a:endParaRPr lang="en-US"/>
           </a:p>
@@ -3717,7 +3717,7 @@
           <a:p>
             <a:fld id="{5BCAD085-E8A6-8845-BD4E-CB4CCA059FC4}" type="datetimeFigureOut">
               <a:rPr lang="en-US" smtClean="0"/>
-              <a:t>7/10/2026</a:t>
+              <a:t>7/9/2026</a:t>
             </a:fld>
             <a:endParaRPr lang="en-US"/>
           </a:p>
@@ -4081,7 +4081,7 @@
           <a:p>
             <a:fld id="{5BCAD085-E8A6-8845-BD4E-CB4CCA059FC4}" type="datetimeFigureOut">
               <a:rPr lang="en-US" smtClean="0"/>
-              <a:t>7/10/2026</a:t>
+              <a:t>7/9/2026</a:t>
             </a:fld>
             <a:endParaRPr lang="en-US"/>
           </a:p>
@@ -4198,7 +4198,7 @@
           <a:p>
             <a:fld id="{5BCAD085-E8A6-8845-BD4E-CB4CCA059FC4}" type="datetimeFigureOut">
               <a:rPr lang="en-US" smtClean="0"/>
-              <a:t>7/10/2026</a:t>
+              <a:t>7/9/2026</a:t>
             </a:fld>
             <a:endParaRPr lang="en-US"/>
           </a:p>
@@ -4293,7 +4293,7 @@
           <a:p>
             <a:fld id="{5BCAD085-E8A6-8845-BD4E-CB4CCA059FC4}" type="datetimeFigureOut">
               <a:rPr lang="en-US" smtClean="0"/>
-              <a:t>7/10/2026</a:t>
+              <a:t>7/9/2026</a:t>
             </a:fld>
             <a:endParaRPr lang="en-US"/>
           </a:p>
@@ -4568,7 +4568,7 @@
           <a:p>
             <a:fld id="{5BCAD085-E8A6-8845-BD4E-CB4CCA059FC4}" type="datetimeFigureOut">
               <a:rPr lang="en-US" smtClean="0"/>
-              <a:t>7/10/2026</a:t>
+              <a:t>7/9/2026</a:t>
             </a:fld>
             <a:endParaRPr lang="en-US"/>
           </a:p>
@@ -4823,7 +4823,7 @@
           <a:p>
             <a:fld id="{5BCAD085-E8A6-8845-BD4E-CB4CCA059FC4}" type="datetimeFigureOut">
               <a:rPr lang="en-US" smtClean="0"/>
-              <a:t>7/10/2026</a:t>
+              <a:t>7/9/2026</a:t>
             </a:fld>
             <a:endParaRPr lang="en-US"/>
           </a:p>
@@ -5034,7 +5034,7 @@
           <a:p>
             <a:fld id="{5BCAD085-E8A6-8845-BD4E-CB4CCA059FC4}" type="datetimeFigureOut">
               <a:rPr lang="en-US" smtClean="0"/>
-              <a:t>7/10/2026</a:t>
+              <a:t>7/9/2026</a:t>
             </a:fld>
             <a:endParaRPr lang="en-US"/>
           </a:p>
@@ -5663,6 +5663,34 @@
           </a:p>
         </p:txBody>
       </p:sp>
+      <p:pic>
+        <p:nvPicPr>
+          <p:cNvPr id="8" name="Picture 7">
+            <a:extLst>
+              <a:ext uri="{FF2B5EF4-FFF2-40B4-BE49-F238E27FC236}">
+                <a16:creationId xmlns:a16="http://schemas.microsoft.com/office/drawing/2014/main" id="{A9E188E0-E73F-7AA5-04EC-D27495EDFADE}"/>
+              </a:ext>
+            </a:extLst>
+          </p:cNvPr>
+          <p:cNvPicPr>
+            <a:picLocks noChangeAspect="1"/>
+          </p:cNvPicPr>
+          <p:nvPr/>
+        </p:nvPicPr>
+        <p:blipFill>
+          <a:blip r:embed="rId2"/>
+          <a:stretch/>
+        </p:blipFill>
+        <p:spPr>
+          <a:xfrm>
+            <a:off x="5176206" y="3286618"/>
+            <a:ext cx="1467055" cy="400105"/>
+          </a:xfrm>
+          <a:prstGeom prst="rect">
+            <a:avLst/>
+          </a:prstGeom>
+        </p:spPr>
+      </p:pic>
     </p:spTree>
   </p:cSld>
   <p:clrMapOvr>

--- a/AI,ML,GENAI,AGENTIC.pptx
+++ b/AI,ML,GENAI,AGENTIC.pptx
@@ -2332,7 +2332,7 @@
           <a:p>
             <a:fld id="{3BAD7437-FAE0-451C-8BB2-D27B3E1DE48E}" type="datetimeFigureOut">
               <a:rPr lang="en-AU" smtClean="0"/>
-              <a:t>9/07/2026</a:t>
+              <a:t>8/10/2026</a:t>
             </a:fld>
             <a:endParaRPr lang="en-AU"/>
           </a:p>
@@ -2729,7 +2729,7 @@
           <a:p>
             <a:fld id="{5BCAD085-E8A6-8845-BD4E-CB4CCA059FC4}" type="datetimeFigureOut">
               <a:rPr lang="en-US" smtClean="0"/>
-              <a:t>7/9/2026</a:t>
+              <a:t>10/8/2026</a:t>
             </a:fld>
             <a:endParaRPr lang="en-US"/>
           </a:p>
@@ -2897,7 +2897,7 @@
           <a:p>
             <a:fld id="{5BCAD085-E8A6-8845-BD4E-CB4CCA059FC4}" type="datetimeFigureOut">
               <a:rPr lang="en-US" smtClean="0"/>
-              <a:t>7/9/2026</a:t>
+              <a:t>10/8/2026</a:t>
             </a:fld>
             <a:endParaRPr lang="en-US"/>
           </a:p>
@@ -3075,7 +3075,7 @@
           <a:p>
             <a:fld id="{5BCAD085-E8A6-8845-BD4E-CB4CCA059FC4}" type="datetimeFigureOut">
               <a:rPr lang="en-US" smtClean="0"/>
-              <a:t>7/9/2026</a:t>
+              <a:t>10/8/2026</a:t>
             </a:fld>
             <a:endParaRPr lang="en-US"/>
           </a:p>
@@ -3243,7 +3243,7 @@
           <a:p>
             <a:fld id="{5BCAD085-E8A6-8845-BD4E-CB4CCA059FC4}" type="datetimeFigureOut">
               <a:rPr lang="en-US" smtClean="0"/>
-              <a:t>7/9/2026</a:t>
+              <a:t>10/8/2026</a:t>
             </a:fld>
             <a:endParaRPr lang="en-US"/>
           </a:p>
@@ -3488,7 +3488,7 @@
           <a:p>
             <a:fld id="{5BCAD085-E8A6-8845-BD4E-CB4CCA059FC4}" type="datetimeFigureOut">
               <a:rPr lang="en-US" smtClean="0"/>
-              <a:t>7/9/2026</a:t>
+              <a:t>10/8/2026</a:t>
             </a:fld>
             <a:endParaRPr lang="en-US"/>
           </a:p>
@@ -3717,7 +3717,7 @@
           <a:p>
             <a:fld id="{5BCAD085-E8A6-8845-BD4E-CB4CCA059FC4}" type="datetimeFigureOut">
               <a:rPr lang="en-US" smtClean="0"/>
-              <a:t>7/9/2026</a:t>
+              <a:t>10/8/2026</a:t>
             </a:fld>
             <a:endParaRPr lang="en-US"/>
           </a:p>
@@ -4081,7 +4081,7 @@
           <a:p>
             <a:fld id="{5BCAD085-E8A6-8845-BD4E-CB4CCA059FC4}" type="datetimeFigureOut">
               <a:rPr lang="en-US" smtClean="0"/>
-              <a:t>7/9/2026</a:t>
+              <a:t>10/8/2026</a:t>
             </a:fld>
             <a:endParaRPr lang="en-US"/>
           </a:p>
@@ -4198,7 +4198,7 @@
           <a:p>
             <a:fld id="{5BCAD085-E8A6-8845-BD4E-CB4CCA059FC4}" type="datetimeFigureOut">
               <a:rPr lang="en-US" smtClean="0"/>
-              <a:t>7/9/2026</a:t>
+              <a:t>10/8/2026</a:t>
             </a:fld>
             <a:endParaRPr lang="en-US"/>
           </a:p>
@@ -4293,7 +4293,7 @@
           <a:p>
             <a:fld id="{5BCAD085-E8A6-8845-BD4E-CB4CCA059FC4}" type="datetimeFigureOut">
               <a:rPr lang="en-US" smtClean="0"/>
-              <a:t>7/9/2026</a:t>
+              <a:t>10/8/2026</a:t>
             </a:fld>
             <a:endParaRPr lang="en-US"/>
           </a:p>
@@ -4568,7 +4568,7 @@
           <a:p>
             <a:fld id="{5BCAD085-E8A6-8845-BD4E-CB4CCA059FC4}" type="datetimeFigureOut">
               <a:rPr lang="en-US" smtClean="0"/>
-              <a:t>7/9/2026</a:t>
+              <a:t>10/8/2026</a:t>
             </a:fld>
             <a:endParaRPr lang="en-US"/>
           </a:p>
@@ -4823,7 +4823,7 @@
           <a:p>
             <a:fld id="{5BCAD085-E8A6-8845-BD4E-CB4CCA059FC4}" type="datetimeFigureOut">
               <a:rPr lang="en-US" smtClean="0"/>
-              <a:t>7/9/2026</a:t>
+              <a:t>10/8/2026</a:t>
             </a:fld>
             <a:endParaRPr lang="en-US"/>
           </a:p>
@@ -5034,7 +5034,7 @@
           <a:p>
             <a:fld id="{5BCAD085-E8A6-8845-BD4E-CB4CCA059FC4}" type="datetimeFigureOut">
               <a:rPr lang="en-US" smtClean="0"/>
-              <a:t>7/9/2026</a:t>
+              <a:t>10/8/2026</a:t>
             </a:fld>
             <a:endParaRPr lang="en-US"/>
           </a:p>
@@ -5663,34 +5663,6 @@
           </a:p>
         </p:txBody>
       </p:sp>
-      <p:pic>
-        <p:nvPicPr>
-          <p:cNvPr id="8" name="Picture 7">
-            <a:extLst>
-              <a:ext uri="{FF2B5EF4-FFF2-40B4-BE49-F238E27FC236}">
-                <a16:creationId xmlns:a16="http://schemas.microsoft.com/office/drawing/2014/main" id="{A9E188E0-E73F-7AA5-04EC-D27495EDFADE}"/>
-              </a:ext>
-            </a:extLst>
-          </p:cNvPr>
-          <p:cNvPicPr>
-            <a:picLocks noChangeAspect="1"/>
-          </p:cNvPicPr>
-          <p:nvPr/>
-        </p:nvPicPr>
-        <p:blipFill>
-          <a:blip r:embed="rId2"/>
-          <a:stretch/>
-        </p:blipFill>
-        <p:spPr>
-          <a:xfrm>
-            <a:off x="5176206" y="3286618"/>
-            <a:ext cx="1467055" cy="400105"/>
-          </a:xfrm>
-          <a:prstGeom prst="rect">
-            <a:avLst/>
-          </a:prstGeom>
-        </p:spPr>
-      </p:pic>
     </p:spTree>
   </p:cSld>
   <p:clrMapOvr>
